--- a/ppt/Grade10/G10_S44_Refraction_Through_a_Lens_2.pptx
+++ b/ppt/Grade10/G10_S44_Refraction_Through_a_Lens_2.pptx
@@ -4857,7 +4857,7 @@
                 </a:solidFill>
                 <a:latin typeface="Calibri"/>
               </a:rPr>
-              <a:t>Q1 — Concave Image</a:t>
+              <a:t>Q1 — Moving the Object</a:t>
             </a:r>
           </a:p>
         </p:txBody>
@@ -4944,7 +4944,7 @@
                 </a:solidFill>
                 <a:latin typeface="Calibri"/>
               </a:rPr>
-              <a:t>The image formed by a concave lens is always:</a:t>
+              <a:t>An object is slowly moved closer to a concave lens. The image it forms:</a:t>
             </a:r>
           </a:p>
         </p:txBody>
@@ -5104,7 +5104,7 @@
                 </a:solidFill>
                 <a:latin typeface="Calibri"/>
               </a:rPr>
-              <a:t>Real and inverted</a:t>
+              <a:t>Becomes real and inverted</a:t>
             </a:r>
           </a:p>
         </p:txBody>
@@ -5264,7 +5264,7 @@
                 </a:solidFill>
                 <a:latin typeface="Calibri"/>
               </a:rPr>
-              <a:t>Virtual, erect and diminished</a:t>
+              <a:t>Stays virtual and erect, getting slightly larger but always smaller than the object</a:t>
             </a:r>
           </a:p>
         </p:txBody>
@@ -5424,7 +5424,7 @@
                 </a:solidFill>
                 <a:latin typeface="Calibri"/>
               </a:rPr>
-              <a:t>Real and magnified</a:t>
+              <a:t>Disappears at the focus</a:t>
             </a:r>
           </a:p>
         </p:txBody>
@@ -5584,7 +5584,7 @@
                 </a:solidFill>
                 <a:latin typeface="Calibri"/>
               </a:rPr>
-              <a:t>Virtual and magnified</a:t>
+              <a:t>Becomes magnified and inverted</a:t>
             </a:r>
           </a:p>
         </p:txBody>
@@ -5768,7 +5768,7 @@
                 </a:solidFill>
                 <a:latin typeface="Calibri"/>
               </a:rPr>
-              <a:t>Q1 — Concave Image</a:t>
+              <a:t>Q1 — Moving the Object</a:t>
             </a:r>
           </a:p>
         </p:txBody>
@@ -5855,7 +5855,7 @@
                 </a:solidFill>
                 <a:latin typeface="Calibri"/>
               </a:rPr>
-              <a:t>The image formed by a concave lens is always:</a:t>
+              <a:t>An object is slowly moved closer to a concave lens. The image it forms:</a:t>
             </a:r>
           </a:p>
         </p:txBody>
@@ -6015,7 +6015,7 @@
                 </a:solidFill>
                 <a:latin typeface="Calibri"/>
               </a:rPr>
-              <a:t>Real and inverted</a:t>
+              <a:t>Becomes real and inverted</a:t>
             </a:r>
           </a:p>
         </p:txBody>
@@ -6177,7 +6177,7 @@
                 </a:solidFill>
                 <a:latin typeface="Calibri"/>
               </a:rPr>
-              <a:t>Virtual, erect and diminished</a:t>
+              <a:t>Stays virtual and erect, getting slightly larger but always smaller than the object</a:t>
             </a:r>
           </a:p>
         </p:txBody>
@@ -6337,7 +6337,7 @@
                 </a:solidFill>
                 <a:latin typeface="Calibri"/>
               </a:rPr>
-              <a:t>Real and magnified</a:t>
+              <a:t>Disappears at the focus</a:t>
             </a:r>
           </a:p>
         </p:txBody>
@@ -6497,7 +6497,7 @@
                 </a:solidFill>
                 <a:latin typeface="Calibri"/>
               </a:rPr>
-              <a:t>Virtual and magnified</a:t>
+              <a:t>Becomes magnified and inverted</a:t>
             </a:r>
           </a:p>
         </p:txBody>
@@ -6623,7 +6623,7 @@
                 </a:solidFill>
                 <a:latin typeface="Calibri"/>
               </a:rPr>
-              <a:t>A concave (diverging) lens forms a virtual, erect, diminished image for every position of the object.</a:t>
+              <a:t>A concave lens gives a virtual, erect, diminished image for every object position. As the object approaches, the image grows a little but never exceeds the object's size or becomes real.</a:t>
             </a:r>
           </a:p>
         </p:txBody>
@@ -6807,7 +6807,7 @@
                 </a:solidFill>
                 <a:latin typeface="Calibri"/>
               </a:rPr>
-              <a:t>Q2 — Sign of f</a:t>
+              <a:t>Q2 — Identify the Lens</a:t>
             </a:r>
           </a:p>
         </p:txBody>
@@ -6894,7 +6894,7 @@
                 </a:solidFill>
                 <a:latin typeface="Calibri"/>
               </a:rPr>
-              <a:t>In the New Cartesian sign convention, the focal length of a concave lens is taken as:</a:t>
+              <a:t>A lens has a power of −2.5 D. This lens is:</a:t>
             </a:r>
           </a:p>
         </p:txBody>
@@ -7054,7 +7054,7 @@
                 </a:solidFill>
                 <a:latin typeface="Calibri"/>
               </a:rPr>
-              <a:t>Positive</a:t>
+              <a:t>A convex lens of focal length 40 cm</a:t>
             </a:r>
           </a:p>
         </p:txBody>
@@ -7214,7 +7214,7 @@
                 </a:solidFill>
                 <a:latin typeface="Calibri"/>
               </a:rPr>
-              <a:t>Negative</a:t>
+              <a:t>A concave lens of focal length 40 cm</a:t>
             </a:r>
           </a:p>
         </p:txBody>
@@ -7374,7 +7374,7 @@
                 </a:solidFill>
                 <a:latin typeface="Calibri"/>
               </a:rPr>
-              <a:t>Zero</a:t>
+              <a:t>A convex lens of focal length 25 cm</a:t>
             </a:r>
           </a:p>
         </p:txBody>
@@ -7534,7 +7534,7 @@
                 </a:solidFill>
                 <a:latin typeface="Calibri"/>
               </a:rPr>
-              <a:t>Infinite</a:t>
+              <a:t>A concave lens of focal length 25 cm</a:t>
             </a:r>
           </a:p>
         </p:txBody>
@@ -7718,7 +7718,7 @@
                 </a:solidFill>
                 <a:latin typeface="Calibri"/>
               </a:rPr>
-              <a:t>Q2 — Sign of f</a:t>
+              <a:t>Q2 — Identify the Lens</a:t>
             </a:r>
           </a:p>
         </p:txBody>
@@ -7805,7 +7805,7 @@
                 </a:solidFill>
                 <a:latin typeface="Calibri"/>
               </a:rPr>
-              <a:t>In the New Cartesian sign convention, the focal length of a concave lens is taken as:</a:t>
+              <a:t>A lens has a power of −2.5 D. This lens is:</a:t>
             </a:r>
           </a:p>
         </p:txBody>
@@ -7965,7 +7965,7 @@
                 </a:solidFill>
                 <a:latin typeface="Calibri"/>
               </a:rPr>
-              <a:t>Positive</a:t>
+              <a:t>A convex lens of focal length 40 cm</a:t>
             </a:r>
           </a:p>
         </p:txBody>
@@ -8127,7 +8127,7 @@
                 </a:solidFill>
                 <a:latin typeface="Calibri"/>
               </a:rPr>
-              <a:t>Negative</a:t>
+              <a:t>A concave lens of focal length 40 cm</a:t>
             </a:r>
           </a:p>
         </p:txBody>
@@ -8287,7 +8287,7 @@
                 </a:solidFill>
                 <a:latin typeface="Calibri"/>
               </a:rPr>
-              <a:t>Zero</a:t>
+              <a:t>A convex lens of focal length 25 cm</a:t>
             </a:r>
           </a:p>
         </p:txBody>
@@ -8447,7 +8447,7 @@
                 </a:solidFill>
                 <a:latin typeface="Calibri"/>
               </a:rPr>
-              <a:t>Infinite</a:t>
+              <a:t>A concave lens of focal length 25 cm</a:t>
             </a:r>
           </a:p>
         </p:txBody>
@@ -8573,7 +8573,7 @@
                 </a:solidFill>
                 <a:latin typeface="Calibri"/>
               </a:rPr>
-              <a:t>A convex lens has a positive focal length; a concave (diverging) lens has a negative focal length.</a:t>
+              <a:t>P = 1/f, so f = 1/P = 1/(−2.5) = −0.4 m = −40 cm. The negative sign means it is a diverging (concave) lens, and its focal length is 40 cm.</a:t>
             </a:r>
           </a:p>
         </p:txBody>
@@ -14564,9 +14564,33 @@
           </a:p>
         </p:txBody>
       </p:sp>
-      <p:sp>
-        <p:nvSpPr>
-          <p:cNvPr id="8" name="TextBox 7"/>
+      <p:pic>
+        <p:nvPicPr>
+          <p:cNvPr id="8" name="Picture 7" descr="eye_FFFFFF.png"/>
+          <p:cNvPicPr>
+            <a:picLocks noChangeAspect="1"/>
+          </p:cNvPicPr>
+          <p:nvPr/>
+        </p:nvPicPr>
+        <p:blipFill>
+          <a:blip r:embed="rId2"/>
+          <a:stretch>
+            <a:fillRect/>
+          </a:stretch>
+        </p:blipFill>
+        <p:spPr>
+          <a:xfrm>
+            <a:off x="1070762" y="2323490"/>
+            <a:ext cx="281635" cy="281635"/>
+          </a:xfrm>
+          <a:prstGeom prst="rect">
+            <a:avLst/>
+          </a:prstGeom>
+        </p:spPr>
+      </p:pic>
+      <p:sp>
+        <p:nvSpPr>
+          <p:cNvPr id="9" name="TextBox 8"/>
           <p:cNvSpPr txBox="1"/>
           <p:nvPr/>
         </p:nvSpPr>
@@ -14601,7 +14625,7 @@
       </p:sp>
       <p:sp>
         <p:nvSpPr>
-          <p:cNvPr id="9" name="TextBox 8"/>
+          <p:cNvPr id="10" name="TextBox 9"/>
           <p:cNvSpPr txBox="1"/>
           <p:nvPr/>
         </p:nvSpPr>
@@ -14636,7 +14660,7 @@
       </p:sp>
       <p:sp>
         <p:nvSpPr>
-          <p:cNvPr id="10" name="Rounded Rectangle 9"/>
+          <p:cNvPr id="11" name="Rounded Rectangle 10"/>
           <p:cNvSpPr/>
           <p:nvPr/>
         </p:nvSpPr>
@@ -14688,7 +14712,7 @@
       </p:sp>
       <p:sp>
         <p:nvSpPr>
-          <p:cNvPr id="11" name="Rounded Rectangle 10"/>
+          <p:cNvPr id="12" name="Rounded Rectangle 11"/>
           <p:cNvSpPr/>
           <p:nvPr/>
         </p:nvSpPr>
@@ -14732,9 +14756,33 @@
           </a:p>
         </p:txBody>
       </p:sp>
-      <p:sp>
-        <p:nvSpPr>
-          <p:cNvPr id="12" name="TextBox 11"/>
+      <p:pic>
+        <p:nvPicPr>
+          <p:cNvPr id="13" name="Picture 12" descr="eye_FFFFFF.png"/>
+          <p:cNvPicPr>
+            <a:picLocks noChangeAspect="1"/>
+          </p:cNvPicPr>
+          <p:nvPr/>
+        </p:nvPicPr>
+        <p:blipFill>
+          <a:blip r:embed="rId2"/>
+          <a:stretch>
+            <a:fillRect/>
+          </a:stretch>
+        </p:blipFill>
+        <p:spPr>
+          <a:xfrm>
+            <a:off x="6648602" y="2323490"/>
+            <a:ext cx="281635" cy="281635"/>
+          </a:xfrm>
+          <a:prstGeom prst="rect">
+            <a:avLst/>
+          </a:prstGeom>
+        </p:spPr>
+      </p:pic>
+      <p:sp>
+        <p:nvSpPr>
+          <p:cNvPr id="14" name="TextBox 13"/>
           <p:cNvSpPr txBox="1"/>
           <p:nvPr/>
         </p:nvSpPr>
@@ -14769,7 +14817,7 @@
       </p:sp>
       <p:sp>
         <p:nvSpPr>
-          <p:cNvPr id="13" name="TextBox 12"/>
+          <p:cNvPr id="15" name="TextBox 14"/>
           <p:cNvSpPr txBox="1"/>
           <p:nvPr/>
         </p:nvSpPr>
@@ -14804,7 +14852,7 @@
       </p:sp>
       <p:sp>
         <p:nvSpPr>
-          <p:cNvPr id="14" name="Rounded Rectangle 13"/>
+          <p:cNvPr id="16" name="Rounded Rectangle 15"/>
           <p:cNvSpPr/>
           <p:nvPr/>
         </p:nvSpPr>
@@ -14856,7 +14904,7 @@
       </p:sp>
       <p:sp>
         <p:nvSpPr>
-          <p:cNvPr id="15" name="Rounded Rectangle 14"/>
+          <p:cNvPr id="17" name="Rounded Rectangle 16"/>
           <p:cNvSpPr/>
           <p:nvPr/>
         </p:nvSpPr>
@@ -14900,9 +14948,33 @@
           </a:p>
         </p:txBody>
       </p:sp>
-      <p:sp>
-        <p:nvSpPr>
-          <p:cNvPr id="16" name="TextBox 15"/>
+      <p:pic>
+        <p:nvPicPr>
+          <p:cNvPr id="18" name="Picture 17" descr="lens_FFFFFF.png"/>
+          <p:cNvPicPr>
+            <a:picLocks noChangeAspect="1"/>
+          </p:cNvPicPr>
+          <p:nvPr/>
+        </p:nvPicPr>
+        <p:blipFill>
+          <a:blip r:embed="rId3"/>
+          <a:stretch>
+            <a:fillRect/>
+          </a:stretch>
+        </p:blipFill>
+        <p:spPr>
+          <a:xfrm>
+            <a:off x="1070762" y="4152290"/>
+            <a:ext cx="281635" cy="281635"/>
+          </a:xfrm>
+          <a:prstGeom prst="rect">
+            <a:avLst/>
+          </a:prstGeom>
+        </p:spPr>
+      </p:pic>
+      <p:sp>
+        <p:nvSpPr>
+          <p:cNvPr id="19" name="TextBox 18"/>
           <p:cNvSpPr txBox="1"/>
           <p:nvPr/>
         </p:nvSpPr>
@@ -14937,7 +15009,7 @@
       </p:sp>
       <p:sp>
         <p:nvSpPr>
-          <p:cNvPr id="17" name="TextBox 16"/>
+          <p:cNvPr id="20" name="TextBox 19"/>
           <p:cNvSpPr txBox="1"/>
           <p:nvPr/>
         </p:nvSpPr>
@@ -14972,7 +15044,7 @@
       </p:sp>
       <p:sp>
         <p:nvSpPr>
-          <p:cNvPr id="18" name="Rounded Rectangle 17"/>
+          <p:cNvPr id="21" name="Rounded Rectangle 20"/>
           <p:cNvSpPr/>
           <p:nvPr/>
         </p:nvSpPr>
@@ -15024,7 +15096,7 @@
       </p:sp>
       <p:sp>
         <p:nvSpPr>
-          <p:cNvPr id="19" name="Rounded Rectangle 18"/>
+          <p:cNvPr id="22" name="Rounded Rectangle 21"/>
           <p:cNvSpPr/>
           <p:nvPr/>
         </p:nvSpPr>
@@ -15068,9 +15140,33 @@
           </a:p>
         </p:txBody>
       </p:sp>
-      <p:sp>
-        <p:nvSpPr>
-          <p:cNvPr id="20" name="TextBox 19"/>
+      <p:pic>
+        <p:nvPicPr>
+          <p:cNvPr id="23" name="Picture 22" descr="lens_FFFFFF.png"/>
+          <p:cNvPicPr>
+            <a:picLocks noChangeAspect="1"/>
+          </p:cNvPicPr>
+          <p:nvPr/>
+        </p:nvPicPr>
+        <p:blipFill>
+          <a:blip r:embed="rId3"/>
+          <a:stretch>
+            <a:fillRect/>
+          </a:stretch>
+        </p:blipFill>
+        <p:spPr>
+          <a:xfrm>
+            <a:off x="6648602" y="4152290"/>
+            <a:ext cx="281635" cy="281635"/>
+          </a:xfrm>
+          <a:prstGeom prst="rect">
+            <a:avLst/>
+          </a:prstGeom>
+        </p:spPr>
+      </p:pic>
+      <p:sp>
+        <p:nvSpPr>
+          <p:cNvPr id="24" name="TextBox 23"/>
           <p:cNvSpPr txBox="1"/>
           <p:nvPr/>
         </p:nvSpPr>
@@ -15105,7 +15201,7 @@
       </p:sp>
       <p:sp>
         <p:nvSpPr>
-          <p:cNvPr id="21" name="TextBox 20"/>
+          <p:cNvPr id="25" name="TextBox 24"/>
           <p:cNvSpPr txBox="1"/>
           <p:nvPr/>
         </p:nvSpPr>
@@ -27119,9 +27215,33 @@
           </a:p>
         </p:txBody>
       </p:sp>
-      <p:sp>
-        <p:nvSpPr>
-          <p:cNvPr id="8" name="TextBox 7"/>
+      <p:pic>
+        <p:nvPicPr>
+          <p:cNvPr id="8" name="Picture 7" descr="lens_FFFFFF.png"/>
+          <p:cNvPicPr>
+            <a:picLocks noChangeAspect="1"/>
+          </p:cNvPicPr>
+          <p:nvPr/>
+        </p:nvPicPr>
+        <p:blipFill>
+          <a:blip r:embed="rId2"/>
+          <a:stretch>
+            <a:fillRect/>
+          </a:stretch>
+        </p:blipFill>
+        <p:spPr>
+          <a:xfrm>
+            <a:off x="1070762" y="2323490"/>
+            <a:ext cx="281635" cy="281635"/>
+          </a:xfrm>
+          <a:prstGeom prst="rect">
+            <a:avLst/>
+          </a:prstGeom>
+        </p:spPr>
+      </p:pic>
+      <p:sp>
+        <p:nvSpPr>
+          <p:cNvPr id="9" name="TextBox 8"/>
           <p:cNvSpPr txBox="1"/>
           <p:nvPr/>
         </p:nvSpPr>
@@ -27156,7 +27276,7 @@
       </p:sp>
       <p:sp>
         <p:nvSpPr>
-          <p:cNvPr id="9" name="TextBox 8"/>
+          <p:cNvPr id="10" name="TextBox 9"/>
           <p:cNvSpPr txBox="1"/>
           <p:nvPr/>
         </p:nvSpPr>
@@ -27191,7 +27311,7 @@
       </p:sp>
       <p:sp>
         <p:nvSpPr>
-          <p:cNvPr id="10" name="Rounded Rectangle 9"/>
+          <p:cNvPr id="11" name="Rounded Rectangle 10"/>
           <p:cNvSpPr/>
           <p:nvPr/>
         </p:nvSpPr>
@@ -27243,7 +27363,7 @@
       </p:sp>
       <p:sp>
         <p:nvSpPr>
-          <p:cNvPr id="11" name="Rounded Rectangle 10"/>
+          <p:cNvPr id="12" name="Rounded Rectangle 11"/>
           <p:cNvSpPr/>
           <p:nvPr/>
         </p:nvSpPr>
@@ -27287,9 +27407,33 @@
           </a:p>
         </p:txBody>
       </p:sp>
-      <p:sp>
-        <p:nvSpPr>
-          <p:cNvPr id="12" name="TextBox 11"/>
+      <p:pic>
+        <p:nvPicPr>
+          <p:cNvPr id="13" name="Picture 12" descr="lens_FFFFFF.png"/>
+          <p:cNvPicPr>
+            <a:picLocks noChangeAspect="1"/>
+          </p:cNvPicPr>
+          <p:nvPr/>
+        </p:nvPicPr>
+        <p:blipFill>
+          <a:blip r:embed="rId2"/>
+          <a:stretch>
+            <a:fillRect/>
+          </a:stretch>
+        </p:blipFill>
+        <p:spPr>
+          <a:xfrm>
+            <a:off x="6648602" y="2323490"/>
+            <a:ext cx="281635" cy="281635"/>
+          </a:xfrm>
+          <a:prstGeom prst="rect">
+            <a:avLst/>
+          </a:prstGeom>
+        </p:spPr>
+      </p:pic>
+      <p:sp>
+        <p:nvSpPr>
+          <p:cNvPr id="14" name="TextBox 13"/>
           <p:cNvSpPr txBox="1"/>
           <p:nvPr/>
         </p:nvSpPr>
@@ -27324,7 +27468,7 @@
       </p:sp>
       <p:sp>
         <p:nvSpPr>
-          <p:cNvPr id="13" name="TextBox 12"/>
+          <p:cNvPr id="15" name="TextBox 14"/>
           <p:cNvSpPr txBox="1"/>
           <p:nvPr/>
         </p:nvSpPr>
@@ -27359,7 +27503,7 @@
       </p:sp>
       <p:sp>
         <p:nvSpPr>
-          <p:cNvPr id="14" name="Rounded Rectangle 13"/>
+          <p:cNvPr id="16" name="Rounded Rectangle 15"/>
           <p:cNvSpPr/>
           <p:nvPr/>
         </p:nvSpPr>
@@ -27411,7 +27555,7 @@
       </p:sp>
       <p:sp>
         <p:nvSpPr>
-          <p:cNvPr id="15" name="Rounded Rectangle 14"/>
+          <p:cNvPr id="17" name="Rounded Rectangle 16"/>
           <p:cNvSpPr/>
           <p:nvPr/>
         </p:nvSpPr>
@@ -27455,9 +27599,33 @@
           </a:p>
         </p:txBody>
       </p:sp>
-      <p:sp>
-        <p:nvSpPr>
-          <p:cNvPr id="16" name="TextBox 15"/>
+      <p:pic>
+        <p:nvPicPr>
+          <p:cNvPr id="18" name="Picture 17" descr="spark_FFFFFF.png"/>
+          <p:cNvPicPr>
+            <a:picLocks noChangeAspect="1"/>
+          </p:cNvPicPr>
+          <p:nvPr/>
+        </p:nvPicPr>
+        <p:blipFill>
+          <a:blip r:embed="rId3"/>
+          <a:stretch>
+            <a:fillRect/>
+          </a:stretch>
+        </p:blipFill>
+        <p:spPr>
+          <a:xfrm>
+            <a:off x="1070762" y="4152290"/>
+            <a:ext cx="281635" cy="281635"/>
+          </a:xfrm>
+          <a:prstGeom prst="rect">
+            <a:avLst/>
+          </a:prstGeom>
+        </p:spPr>
+      </p:pic>
+      <p:sp>
+        <p:nvSpPr>
+          <p:cNvPr id="19" name="TextBox 18"/>
           <p:cNvSpPr txBox="1"/>
           <p:nvPr/>
         </p:nvSpPr>
@@ -27492,7 +27660,7 @@
       </p:sp>
       <p:sp>
         <p:nvSpPr>
-          <p:cNvPr id="17" name="TextBox 16"/>
+          <p:cNvPr id="20" name="TextBox 19"/>
           <p:cNvSpPr txBox="1"/>
           <p:nvPr/>
         </p:nvSpPr>
@@ -27527,7 +27695,7 @@
       </p:sp>
       <p:sp>
         <p:nvSpPr>
-          <p:cNvPr id="18" name="Rounded Rectangle 17"/>
+          <p:cNvPr id="21" name="Rounded Rectangle 20"/>
           <p:cNvSpPr/>
           <p:nvPr/>
         </p:nvSpPr>
@@ -27579,7 +27747,7 @@
       </p:sp>
       <p:sp>
         <p:nvSpPr>
-          <p:cNvPr id="19" name="Rounded Rectangle 18"/>
+          <p:cNvPr id="22" name="Rounded Rectangle 21"/>
           <p:cNvSpPr/>
           <p:nvPr/>
         </p:nvSpPr>
@@ -27623,9 +27791,33 @@
           </a:p>
         </p:txBody>
       </p:sp>
-      <p:sp>
-        <p:nvSpPr>
-          <p:cNvPr id="20" name="TextBox 19"/>
+      <p:pic>
+        <p:nvPicPr>
+          <p:cNvPr id="23" name="Picture 22" descr="spark_FFFFFF.png"/>
+          <p:cNvPicPr>
+            <a:picLocks noChangeAspect="1"/>
+          </p:cNvPicPr>
+          <p:nvPr/>
+        </p:nvPicPr>
+        <p:blipFill>
+          <a:blip r:embed="rId3"/>
+          <a:stretch>
+            <a:fillRect/>
+          </a:stretch>
+        </p:blipFill>
+        <p:spPr>
+          <a:xfrm>
+            <a:off x="6648602" y="4152290"/>
+            <a:ext cx="281635" cy="281635"/>
+          </a:xfrm>
+          <a:prstGeom prst="rect">
+            <a:avLst/>
+          </a:prstGeom>
+        </p:spPr>
+      </p:pic>
+      <p:sp>
+        <p:nvSpPr>
+          <p:cNvPr id="24" name="TextBox 23"/>
           <p:cNvSpPr txBox="1"/>
           <p:nvPr/>
         </p:nvSpPr>
@@ -27660,7 +27852,7 @@
       </p:sp>
       <p:sp>
         <p:nvSpPr>
-          <p:cNvPr id="21" name="TextBox 20"/>
+          <p:cNvPr id="25" name="TextBox 24"/>
           <p:cNvSpPr txBox="1"/>
           <p:nvPr/>
         </p:nvSpPr>
